--- a/curso_es/pptx/S09.pptx
+++ b/curso_es/pptx/S09.pptx
@@ -4559,7 +4559,7 @@
                 </a:solidFill>
                 <a:latin typeface="Nunito Sans"/>
               </a:rPr>
-              <a:t>«Iker debería ser nuestro portero: es el más alto de la clase.»</a:t>
+              <a:t>«Un chico debería ser nuestro portero: es el más alto de la clase.»</a:t>
             </a:r>
           </a:p>
         </p:txBody>
@@ -4607,7 +4607,7 @@
                 </a:solidFill>
                 <a:latin typeface="Nunito Sans"/>
               </a:rPr>
-              <a:t>Como con Youssef y el delegado: la altura no viene a cuento, ¿verdad?</a:t>
+              <a:t>Como con el delegado: la altura no viene a cuento, ¿verdad?</a:t>
             </a:r>
           </a:p>
           <a:p>
@@ -4632,7 +4632,7 @@
                 </a:solidFill>
                 <a:latin typeface="Nunito Sans"/>
               </a:rPr>
-              <a:t>Parece igual que lo de Youssef: otra vez la altura.</a:t>
+              <a:t>Parece igual que lo del delegado: otra vez la altura.</a:t>
             </a:r>
           </a:p>
           <a:p>
@@ -5046,7 +5046,7 @@
                           </a:solidFill>
                           <a:latin typeface="Nunito Sans"/>
                         </a:rPr>
-                        <a:t>«Hay que respetar a los profes porque hay que respetarlos»</a:t>
+                        <a:t>«Esta serie es la mejor porque es la mejor»</a:t>
                       </a:r>
                     </a:p>
                   </a:txBody>
@@ -7870,7 +7870,7 @@
                 </a:solidFill>
                 <a:latin typeface="Nunito Sans"/>
               </a:rPr>
-              <a:t>«Youssef debe ser delegado porque es el más alto»</a:t>
+              <a:t>«Un chico debe ser delegado porque es el más alto»</a:t>
             </a:r>
           </a:p>
           <a:p>
